--- a/dist/초5/수학/곱셈과어림/초5_수학_곱셈과어림_04_분수끼리의곱셈_학생용.pptx
+++ b/dist/초5/수학/곱셈과어림/초5_수학_곱셈과어림_04_분수끼리의곱셈_학생용.pptx
@@ -120,13 +120,13 @@
   <p:extLst>
     <p:ext uri="{521415D9-36F7-43E2-AB2F-B90AF26B5E84}">
       <p14:sectionLst xmlns:p14="http://schemas.microsoft.com/office/powerpoint/2010/main">
-        <p14:section name="도입" id="{814e9157-79d0-2335-18b6-1dbf1a4395f1}">
+        <p14:section name="도입" id="{e41a9a6a-25fa-8013-170a-364582589e85}">
           <p14:sldIdLst>
             <p14:sldId id="256"/>
             <p14:sldId id="257"/>
           </p14:sldIdLst>
         </p14:section>
-        <p14:section name="개념" id="{2e66cd46-4de6-4adf-fb2c-f04dc41e0b89}">
+        <p14:section name="개념" id="{afebf9ee-9086-2488-f819-308f83d2230b}">
           <p14:sldIdLst>
             <p14:sldId id="258"/>
             <p14:sldId id="259"/>
@@ -135,31 +135,31 @@
             <p14:sldId id="263"/>
           </p14:sldIdLst>
         </p14:section>
-        <p14:section name="연습" id="{0acf3281-c72b-85b9-0dca-b757195fd326}">
+        <p14:section name="연습" id="{f070aacf-1e41-ec9d-6a11-f9576faf0ed5}">
           <p14:sldIdLst>
             <p14:sldId id="261"/>
             <p14:sldId id="264"/>
             <p14:sldId id="265"/>
           </p14:sldIdLst>
         </p14:section>
-        <p14:section name="개념" id="{0e82fed3-a89f-e130-21ab-967ec261c952}">
+        <p14:section name="개념" id="{01b4c3b6-e434-ef5d-9f5e-95e61298da8e}">
           <p14:sldIdLst/>
         </p14:section>
-        <p14:section name="연습" id="{5f2b566c-9867-630e-2000-bdb3f4058703}">
+        <p14:section name="연습" id="{5b50fd94-fd4e-c9e3-ff00-24cb6b66da00}">
           <p14:sldIdLst/>
         </p14:section>
-        <p14:section name="확인" id="{3952dd76-b61f-c1aa-426a-4592241ede29}">
+        <p14:section name="확인" id="{4c3f94db-8834-eb55-bfbf-16b98c7ea0be}">
           <p14:sldIdLst>
             <p14:sldId id="266"/>
             <p14:sldId id="267"/>
           </p14:sldIdLst>
         </p14:section>
-        <p14:section name="정리" id="{a0f9d188-46dc-8624-3fde-55d1d22c91d3}">
+        <p14:section name="정리" id="{8dff5a4e-b481-bdd9-17e8-8befba8b984a}">
           <p14:sldIdLst>
             <p14:sldId id="268"/>
           </p14:sldIdLst>
         </p14:section>
-        <p14:section name="보충" id="{d707fb84-da70-da63-1736-76b3f503fd2c}">
+        <p14:section name="보충" id="{cc6fc89d-a089-7878-d6cb-3e536ed796d9}">
           <p14:sldIdLst>
             <p14:sldId id="269"/>
           </p14:sldIdLst>
